--- a/Backend/services/pptx-generator-service/slides/padel/secao_iluminacao.pptx
+++ b/Backend/services/pptx-generator-service/slides/padel/secao_iluminacao.pptx
@@ -3775,7 +3775,7 @@
                   <a:latin typeface="Poppins "/>
                   <a:cs typeface="Poppins Light"/>
                 </a:rPr>
-                <a:t>portencia_projetores</a:t>
+                <a:t>potencia_projetores</a:t>
               </a:r>
               <a:r>
                 <a:rPr lang="pt-BR" sz="1400">
